--- a/山又高.pptx
+++ b/山又高.pptx
@@ -104,6 +104,22 @@
       </a:defRPr>
     </a:lvl9pPr>
   </p:defaultTextStyle>
+  <p:extLst>
+    <p:ext uri="{EFAFB233-063F-42B5-8137-9DF3F51BA10A}">
+      <p15:sldGuideLst xmlns:p15="http://schemas.microsoft.com/office/powerpoint/2012/main">
+        <p15:guide id="1" orient="horz" pos="1620">
+          <p15:clr>
+            <a:srgbClr val="A4A3A4"/>
+          </p15:clr>
+        </p15:guide>
+        <p15:guide id="2" pos="2880">
+          <p15:clr>
+            <a:srgbClr val="A4A3A4"/>
+          </p15:clr>
+        </p15:guide>
+      </p15:sldGuideLst>
+    </p:ext>
+  </p:extLst>
 </p:presentation>
 </file>
 
@@ -145,10 +161,9 @@
           <a:lstStyle/>
           <a:p>
             <a:r>
-              <a:rPr lang="zh-TW" altLang="en-US" smtClean="0"/>
+              <a:rPr lang="zh-TW" altLang="en-US"/>
               <a:t>按一下以編輯母片標題樣式</a:t>
             </a:r>
-            <a:endParaRPr lang="zh-TW" altLang="en-US"/>
           </a:p>
         </p:txBody>
       </p:sp>
@@ -264,10 +279,9 @@
           </a:lstStyle>
           <a:p>
             <a:r>
-              <a:rPr lang="zh-TW" altLang="en-US" smtClean="0"/>
+              <a:rPr lang="zh-TW" altLang="en-US"/>
               <a:t>按一下以編輯母片副標題樣式</a:t>
             </a:r>
-            <a:endParaRPr lang="zh-TW" altLang="en-US"/>
           </a:p>
         </p:txBody>
       </p:sp>
@@ -288,7 +302,7 @@
           <a:p>
             <a:fld id="{C520DDB7-EA95-4FCE-A6EA-F779B0A6B144}" type="datetimeFigureOut">
               <a:rPr lang="zh-TW" altLang="en-US" smtClean="0"/>
-              <a:t>2019/7/21</a:t>
+              <a:t>2025/2/23</a:t>
             </a:fld>
             <a:endParaRPr lang="zh-TW" altLang="en-US"/>
           </a:p>
@@ -377,10 +391,9 @@
           <a:lstStyle/>
           <a:p>
             <a:r>
-              <a:rPr lang="zh-TW" altLang="en-US" smtClean="0"/>
+              <a:rPr lang="zh-TW" altLang="en-US"/>
               <a:t>按一下以編輯母片標題樣式</a:t>
             </a:r>
-            <a:endParaRPr lang="zh-TW" altLang="en-US"/>
           </a:p>
         </p:txBody>
       </p:sp>
@@ -401,38 +414,37 @@
           <a:p>
             <a:pPr lvl="0"/>
             <a:r>
-              <a:rPr lang="zh-TW" altLang="en-US" smtClean="0"/>
+              <a:rPr lang="zh-TW" altLang="en-US"/>
               <a:t>按一下以編輯母片文字樣式</a:t>
             </a:r>
           </a:p>
           <a:p>
             <a:pPr lvl="1"/>
             <a:r>
-              <a:rPr lang="zh-TW" altLang="en-US" smtClean="0"/>
+              <a:rPr lang="zh-TW" altLang="en-US"/>
               <a:t>第二層</a:t>
             </a:r>
           </a:p>
           <a:p>
             <a:pPr lvl="2"/>
             <a:r>
-              <a:rPr lang="zh-TW" altLang="en-US" smtClean="0"/>
+              <a:rPr lang="zh-TW" altLang="en-US"/>
               <a:t>第三層</a:t>
             </a:r>
           </a:p>
           <a:p>
             <a:pPr lvl="3"/>
             <a:r>
-              <a:rPr lang="zh-TW" altLang="en-US" smtClean="0"/>
+              <a:rPr lang="zh-TW" altLang="en-US"/>
               <a:t>第四層</a:t>
             </a:r>
           </a:p>
           <a:p>
             <a:pPr lvl="4"/>
             <a:r>
-              <a:rPr lang="zh-TW" altLang="en-US" smtClean="0"/>
+              <a:rPr lang="zh-TW" altLang="en-US"/>
               <a:t>第五層</a:t>
             </a:r>
-            <a:endParaRPr lang="zh-TW" altLang="en-US"/>
           </a:p>
         </p:txBody>
       </p:sp>
@@ -453,7 +465,7 @@
           <a:p>
             <a:fld id="{C520DDB7-EA95-4FCE-A6EA-F779B0A6B144}" type="datetimeFigureOut">
               <a:rPr lang="zh-TW" altLang="en-US" smtClean="0"/>
-              <a:t>2019/7/21</a:t>
+              <a:t>2025/2/23</a:t>
             </a:fld>
             <a:endParaRPr lang="zh-TW" altLang="en-US"/>
           </a:p>
@@ -547,10 +559,9 @@
           <a:lstStyle/>
           <a:p>
             <a:r>
-              <a:rPr lang="zh-TW" altLang="en-US" smtClean="0"/>
+              <a:rPr lang="zh-TW" altLang="en-US"/>
               <a:t>按一下以編輯母片標題樣式</a:t>
             </a:r>
-            <a:endParaRPr lang="zh-TW" altLang="en-US"/>
           </a:p>
         </p:txBody>
       </p:sp>
@@ -576,38 +587,37 @@
           <a:p>
             <a:pPr lvl="0"/>
             <a:r>
-              <a:rPr lang="zh-TW" altLang="en-US" smtClean="0"/>
+              <a:rPr lang="zh-TW" altLang="en-US"/>
               <a:t>按一下以編輯母片文字樣式</a:t>
             </a:r>
           </a:p>
           <a:p>
             <a:pPr lvl="1"/>
             <a:r>
-              <a:rPr lang="zh-TW" altLang="en-US" smtClean="0"/>
+              <a:rPr lang="zh-TW" altLang="en-US"/>
               <a:t>第二層</a:t>
             </a:r>
           </a:p>
           <a:p>
             <a:pPr lvl="2"/>
             <a:r>
-              <a:rPr lang="zh-TW" altLang="en-US" smtClean="0"/>
+              <a:rPr lang="zh-TW" altLang="en-US"/>
               <a:t>第三層</a:t>
             </a:r>
           </a:p>
           <a:p>
             <a:pPr lvl="3"/>
             <a:r>
-              <a:rPr lang="zh-TW" altLang="en-US" smtClean="0"/>
+              <a:rPr lang="zh-TW" altLang="en-US"/>
               <a:t>第四層</a:t>
             </a:r>
           </a:p>
           <a:p>
             <a:pPr lvl="4"/>
             <a:r>
-              <a:rPr lang="zh-TW" altLang="en-US" smtClean="0"/>
+              <a:rPr lang="zh-TW" altLang="en-US"/>
               <a:t>第五層</a:t>
             </a:r>
-            <a:endParaRPr lang="zh-TW" altLang="en-US"/>
           </a:p>
         </p:txBody>
       </p:sp>
@@ -628,7 +638,7 @@
           <a:p>
             <a:fld id="{C520DDB7-EA95-4FCE-A6EA-F779B0A6B144}" type="datetimeFigureOut">
               <a:rPr lang="zh-TW" altLang="en-US" smtClean="0"/>
-              <a:t>2019/7/21</a:t>
+              <a:t>2025/2/23</a:t>
             </a:fld>
             <a:endParaRPr lang="zh-TW" altLang="en-US"/>
           </a:p>
@@ -717,10 +727,9 @@
           <a:lstStyle/>
           <a:p>
             <a:r>
-              <a:rPr lang="zh-TW" altLang="en-US" smtClean="0"/>
+              <a:rPr lang="zh-TW" altLang="en-US"/>
               <a:t>按一下以編輯母片標題樣式</a:t>
             </a:r>
-            <a:endParaRPr lang="zh-TW" altLang="en-US"/>
           </a:p>
         </p:txBody>
       </p:sp>
@@ -741,38 +750,37 @@
           <a:p>
             <a:pPr lvl="0"/>
             <a:r>
-              <a:rPr lang="zh-TW" altLang="en-US" smtClean="0"/>
+              <a:rPr lang="zh-TW" altLang="en-US"/>
               <a:t>按一下以編輯母片文字樣式</a:t>
             </a:r>
           </a:p>
           <a:p>
             <a:pPr lvl="1"/>
             <a:r>
-              <a:rPr lang="zh-TW" altLang="en-US" smtClean="0"/>
+              <a:rPr lang="zh-TW" altLang="en-US"/>
               <a:t>第二層</a:t>
             </a:r>
           </a:p>
           <a:p>
             <a:pPr lvl="2"/>
             <a:r>
-              <a:rPr lang="zh-TW" altLang="en-US" smtClean="0"/>
+              <a:rPr lang="zh-TW" altLang="en-US"/>
               <a:t>第三層</a:t>
             </a:r>
           </a:p>
           <a:p>
             <a:pPr lvl="3"/>
             <a:r>
-              <a:rPr lang="zh-TW" altLang="en-US" smtClean="0"/>
+              <a:rPr lang="zh-TW" altLang="en-US"/>
               <a:t>第四層</a:t>
             </a:r>
           </a:p>
           <a:p>
             <a:pPr lvl="4"/>
             <a:r>
-              <a:rPr lang="zh-TW" altLang="en-US" smtClean="0"/>
+              <a:rPr lang="zh-TW" altLang="en-US"/>
               <a:t>第五層</a:t>
             </a:r>
-            <a:endParaRPr lang="zh-TW" altLang="en-US"/>
           </a:p>
         </p:txBody>
       </p:sp>
@@ -793,7 +801,7 @@
           <a:p>
             <a:fld id="{C520DDB7-EA95-4FCE-A6EA-F779B0A6B144}" type="datetimeFigureOut">
               <a:rPr lang="zh-TW" altLang="en-US" smtClean="0"/>
-              <a:t>2019/7/21</a:t>
+              <a:t>2025/2/23</a:t>
             </a:fld>
             <a:endParaRPr lang="zh-TW" altLang="en-US"/>
           </a:p>
@@ -891,10 +899,9 @@
           </a:lstStyle>
           <a:p>
             <a:r>
-              <a:rPr lang="zh-TW" altLang="en-US" smtClean="0"/>
+              <a:rPr lang="zh-TW" altLang="en-US"/>
               <a:t>按一下以編輯母片標題樣式</a:t>
             </a:r>
-            <a:endParaRPr lang="zh-TW" altLang="en-US"/>
           </a:p>
         </p:txBody>
       </p:sp>
@@ -1011,7 +1018,7 @@
           <a:p>
             <a:pPr lvl="0"/>
             <a:r>
-              <a:rPr lang="zh-TW" altLang="en-US" smtClean="0"/>
+              <a:rPr lang="zh-TW" altLang="en-US"/>
               <a:t>按一下以編輯母片文字樣式</a:t>
             </a:r>
           </a:p>
@@ -1034,7 +1041,7 @@
           <a:p>
             <a:fld id="{C520DDB7-EA95-4FCE-A6EA-F779B0A6B144}" type="datetimeFigureOut">
               <a:rPr lang="zh-TW" altLang="en-US" smtClean="0"/>
-              <a:t>2019/7/21</a:t>
+              <a:t>2025/2/23</a:t>
             </a:fld>
             <a:endParaRPr lang="zh-TW" altLang="en-US"/>
           </a:p>
@@ -1123,10 +1130,9 @@
           <a:lstStyle/>
           <a:p>
             <a:r>
-              <a:rPr lang="zh-TW" altLang="en-US" smtClean="0"/>
+              <a:rPr lang="zh-TW" altLang="en-US"/>
               <a:t>按一下以編輯母片標題樣式</a:t>
             </a:r>
-            <a:endParaRPr lang="zh-TW" altLang="en-US"/>
           </a:p>
         </p:txBody>
       </p:sp>
@@ -1180,38 +1186,37 @@
           <a:p>
             <a:pPr lvl="0"/>
             <a:r>
-              <a:rPr lang="zh-TW" altLang="en-US" smtClean="0"/>
+              <a:rPr lang="zh-TW" altLang="en-US"/>
               <a:t>按一下以編輯母片文字樣式</a:t>
             </a:r>
           </a:p>
           <a:p>
             <a:pPr lvl="1"/>
             <a:r>
-              <a:rPr lang="zh-TW" altLang="en-US" smtClean="0"/>
+              <a:rPr lang="zh-TW" altLang="en-US"/>
               <a:t>第二層</a:t>
             </a:r>
           </a:p>
           <a:p>
             <a:pPr lvl="2"/>
             <a:r>
-              <a:rPr lang="zh-TW" altLang="en-US" smtClean="0"/>
+              <a:rPr lang="zh-TW" altLang="en-US"/>
               <a:t>第三層</a:t>
             </a:r>
           </a:p>
           <a:p>
             <a:pPr lvl="3"/>
             <a:r>
-              <a:rPr lang="zh-TW" altLang="en-US" smtClean="0"/>
+              <a:rPr lang="zh-TW" altLang="en-US"/>
               <a:t>第四層</a:t>
             </a:r>
           </a:p>
           <a:p>
             <a:pPr lvl="4"/>
             <a:r>
-              <a:rPr lang="zh-TW" altLang="en-US" smtClean="0"/>
+              <a:rPr lang="zh-TW" altLang="en-US"/>
               <a:t>第五層</a:t>
             </a:r>
-            <a:endParaRPr lang="zh-TW" altLang="en-US"/>
           </a:p>
         </p:txBody>
       </p:sp>
@@ -1265,38 +1270,37 @@
           <a:p>
             <a:pPr lvl="0"/>
             <a:r>
-              <a:rPr lang="zh-TW" altLang="en-US" smtClean="0"/>
+              <a:rPr lang="zh-TW" altLang="en-US"/>
               <a:t>按一下以編輯母片文字樣式</a:t>
             </a:r>
           </a:p>
           <a:p>
             <a:pPr lvl="1"/>
             <a:r>
-              <a:rPr lang="zh-TW" altLang="en-US" smtClean="0"/>
+              <a:rPr lang="zh-TW" altLang="en-US"/>
               <a:t>第二層</a:t>
             </a:r>
           </a:p>
           <a:p>
             <a:pPr lvl="2"/>
             <a:r>
-              <a:rPr lang="zh-TW" altLang="en-US" smtClean="0"/>
+              <a:rPr lang="zh-TW" altLang="en-US"/>
               <a:t>第三層</a:t>
             </a:r>
           </a:p>
           <a:p>
             <a:pPr lvl="3"/>
             <a:r>
-              <a:rPr lang="zh-TW" altLang="en-US" smtClean="0"/>
+              <a:rPr lang="zh-TW" altLang="en-US"/>
               <a:t>第四層</a:t>
             </a:r>
           </a:p>
           <a:p>
             <a:pPr lvl="4"/>
             <a:r>
-              <a:rPr lang="zh-TW" altLang="en-US" smtClean="0"/>
+              <a:rPr lang="zh-TW" altLang="en-US"/>
               <a:t>第五層</a:t>
             </a:r>
-            <a:endParaRPr lang="zh-TW" altLang="en-US"/>
           </a:p>
         </p:txBody>
       </p:sp>
@@ -1317,7 +1321,7 @@
           <a:p>
             <a:fld id="{C520DDB7-EA95-4FCE-A6EA-F779B0A6B144}" type="datetimeFigureOut">
               <a:rPr lang="zh-TW" altLang="en-US" smtClean="0"/>
-              <a:t>2019/7/21</a:t>
+              <a:t>2025/2/23</a:t>
             </a:fld>
             <a:endParaRPr lang="zh-TW" altLang="en-US"/>
           </a:p>
@@ -1410,10 +1414,9 @@
           </a:lstStyle>
           <a:p>
             <a:r>
-              <a:rPr lang="zh-TW" altLang="en-US" smtClean="0"/>
+              <a:rPr lang="zh-TW" altLang="en-US"/>
               <a:t>按一下以編輯母片標題樣式</a:t>
             </a:r>
-            <a:endParaRPr lang="zh-TW" altLang="en-US"/>
           </a:p>
         </p:txBody>
       </p:sp>
@@ -1476,7 +1479,7 @@
           <a:p>
             <a:pPr lvl="0"/>
             <a:r>
-              <a:rPr lang="zh-TW" altLang="en-US" smtClean="0"/>
+              <a:rPr lang="zh-TW" altLang="en-US"/>
               <a:t>按一下以編輯母片文字樣式</a:t>
             </a:r>
           </a:p>
@@ -1532,38 +1535,37 @@
           <a:p>
             <a:pPr lvl="0"/>
             <a:r>
-              <a:rPr lang="zh-TW" altLang="en-US" smtClean="0"/>
+              <a:rPr lang="zh-TW" altLang="en-US"/>
               <a:t>按一下以編輯母片文字樣式</a:t>
             </a:r>
           </a:p>
           <a:p>
             <a:pPr lvl="1"/>
             <a:r>
-              <a:rPr lang="zh-TW" altLang="en-US" smtClean="0"/>
+              <a:rPr lang="zh-TW" altLang="en-US"/>
               <a:t>第二層</a:t>
             </a:r>
           </a:p>
           <a:p>
             <a:pPr lvl="2"/>
             <a:r>
-              <a:rPr lang="zh-TW" altLang="en-US" smtClean="0"/>
+              <a:rPr lang="zh-TW" altLang="en-US"/>
               <a:t>第三層</a:t>
             </a:r>
           </a:p>
           <a:p>
             <a:pPr lvl="3"/>
             <a:r>
-              <a:rPr lang="zh-TW" altLang="en-US" smtClean="0"/>
+              <a:rPr lang="zh-TW" altLang="en-US"/>
               <a:t>第四層</a:t>
             </a:r>
           </a:p>
           <a:p>
             <a:pPr lvl="4"/>
             <a:r>
-              <a:rPr lang="zh-TW" altLang="en-US" smtClean="0"/>
+              <a:rPr lang="zh-TW" altLang="en-US"/>
               <a:t>第五層</a:t>
             </a:r>
-            <a:endParaRPr lang="zh-TW" altLang="en-US"/>
           </a:p>
         </p:txBody>
       </p:sp>
@@ -1626,7 +1628,7 @@
           <a:p>
             <a:pPr lvl="0"/>
             <a:r>
-              <a:rPr lang="zh-TW" altLang="en-US" smtClean="0"/>
+              <a:rPr lang="zh-TW" altLang="en-US"/>
               <a:t>按一下以編輯母片文字樣式</a:t>
             </a:r>
           </a:p>
@@ -1682,38 +1684,37 @@
           <a:p>
             <a:pPr lvl="0"/>
             <a:r>
-              <a:rPr lang="zh-TW" altLang="en-US" smtClean="0"/>
+              <a:rPr lang="zh-TW" altLang="en-US"/>
               <a:t>按一下以編輯母片文字樣式</a:t>
             </a:r>
           </a:p>
           <a:p>
             <a:pPr lvl="1"/>
             <a:r>
-              <a:rPr lang="zh-TW" altLang="en-US" smtClean="0"/>
+              <a:rPr lang="zh-TW" altLang="en-US"/>
               <a:t>第二層</a:t>
             </a:r>
           </a:p>
           <a:p>
             <a:pPr lvl="2"/>
             <a:r>
-              <a:rPr lang="zh-TW" altLang="en-US" smtClean="0"/>
+              <a:rPr lang="zh-TW" altLang="en-US"/>
               <a:t>第三層</a:t>
             </a:r>
           </a:p>
           <a:p>
             <a:pPr lvl="3"/>
             <a:r>
-              <a:rPr lang="zh-TW" altLang="en-US" smtClean="0"/>
+              <a:rPr lang="zh-TW" altLang="en-US"/>
               <a:t>第四層</a:t>
             </a:r>
           </a:p>
           <a:p>
             <a:pPr lvl="4"/>
             <a:r>
-              <a:rPr lang="zh-TW" altLang="en-US" smtClean="0"/>
+              <a:rPr lang="zh-TW" altLang="en-US"/>
               <a:t>第五層</a:t>
             </a:r>
-            <a:endParaRPr lang="zh-TW" altLang="en-US"/>
           </a:p>
         </p:txBody>
       </p:sp>
@@ -1734,7 +1735,7 @@
           <a:p>
             <a:fld id="{C520DDB7-EA95-4FCE-A6EA-F779B0A6B144}" type="datetimeFigureOut">
               <a:rPr lang="zh-TW" altLang="en-US" smtClean="0"/>
-              <a:t>2019/7/21</a:t>
+              <a:t>2025/2/23</a:t>
             </a:fld>
             <a:endParaRPr lang="zh-TW" altLang="en-US"/>
           </a:p>
@@ -1823,10 +1824,9 @@
           <a:lstStyle/>
           <a:p>
             <a:r>
-              <a:rPr lang="zh-TW" altLang="en-US" smtClean="0"/>
+              <a:rPr lang="zh-TW" altLang="en-US"/>
               <a:t>按一下以編輯母片標題樣式</a:t>
             </a:r>
-            <a:endParaRPr lang="zh-TW" altLang="en-US"/>
           </a:p>
         </p:txBody>
       </p:sp>
@@ -1847,7 +1847,7 @@
           <a:p>
             <a:fld id="{C520DDB7-EA95-4FCE-A6EA-F779B0A6B144}" type="datetimeFigureOut">
               <a:rPr lang="zh-TW" altLang="en-US" smtClean="0"/>
-              <a:t>2019/7/21</a:t>
+              <a:t>2025/2/23</a:t>
             </a:fld>
             <a:endParaRPr lang="zh-TW" altLang="en-US"/>
           </a:p>
@@ -1937,7 +1937,7 @@
           <a:p>
             <a:fld id="{C520DDB7-EA95-4FCE-A6EA-F779B0A6B144}" type="datetimeFigureOut">
               <a:rPr lang="zh-TW" altLang="en-US" smtClean="0"/>
-              <a:t>2019/7/21</a:t>
+              <a:t>2025/2/23</a:t>
             </a:fld>
             <a:endParaRPr lang="zh-TW" altLang="en-US"/>
           </a:p>
@@ -2035,10 +2035,9 @@
           </a:lstStyle>
           <a:p>
             <a:r>
-              <a:rPr lang="zh-TW" altLang="en-US" smtClean="0"/>
+              <a:rPr lang="zh-TW" altLang="en-US"/>
               <a:t>按一下以編輯母片標題樣式</a:t>
             </a:r>
-            <a:endParaRPr lang="zh-TW" altLang="en-US"/>
           </a:p>
         </p:txBody>
       </p:sp>
@@ -2092,38 +2091,37 @@
           <a:p>
             <a:pPr lvl="0"/>
             <a:r>
-              <a:rPr lang="zh-TW" altLang="en-US" smtClean="0"/>
+              <a:rPr lang="zh-TW" altLang="en-US"/>
               <a:t>按一下以編輯母片文字樣式</a:t>
             </a:r>
           </a:p>
           <a:p>
             <a:pPr lvl="1"/>
             <a:r>
-              <a:rPr lang="zh-TW" altLang="en-US" smtClean="0"/>
+              <a:rPr lang="zh-TW" altLang="en-US"/>
               <a:t>第二層</a:t>
             </a:r>
           </a:p>
           <a:p>
             <a:pPr lvl="2"/>
             <a:r>
-              <a:rPr lang="zh-TW" altLang="en-US" smtClean="0"/>
+              <a:rPr lang="zh-TW" altLang="en-US"/>
               <a:t>第三層</a:t>
             </a:r>
           </a:p>
           <a:p>
             <a:pPr lvl="3"/>
             <a:r>
-              <a:rPr lang="zh-TW" altLang="en-US" smtClean="0"/>
+              <a:rPr lang="zh-TW" altLang="en-US"/>
               <a:t>第四層</a:t>
             </a:r>
           </a:p>
           <a:p>
             <a:pPr lvl="4"/>
             <a:r>
-              <a:rPr lang="zh-TW" altLang="en-US" smtClean="0"/>
+              <a:rPr lang="zh-TW" altLang="en-US"/>
               <a:t>第五層</a:t>
             </a:r>
-            <a:endParaRPr lang="zh-TW" altLang="en-US"/>
           </a:p>
         </p:txBody>
       </p:sp>
@@ -2186,7 +2184,7 @@
           <a:p>
             <a:pPr lvl="0"/>
             <a:r>
-              <a:rPr lang="zh-TW" altLang="en-US" smtClean="0"/>
+              <a:rPr lang="zh-TW" altLang="en-US"/>
               <a:t>按一下以編輯母片文字樣式</a:t>
             </a:r>
           </a:p>
@@ -2209,7 +2207,7 @@
           <a:p>
             <a:fld id="{C520DDB7-EA95-4FCE-A6EA-F779B0A6B144}" type="datetimeFigureOut">
               <a:rPr lang="zh-TW" altLang="en-US" smtClean="0"/>
-              <a:t>2019/7/21</a:t>
+              <a:t>2025/2/23</a:t>
             </a:fld>
             <a:endParaRPr lang="zh-TW" altLang="en-US"/>
           </a:p>
@@ -2307,10 +2305,9 @@
           </a:lstStyle>
           <a:p>
             <a:r>
-              <a:rPr lang="zh-TW" altLang="en-US" smtClean="0"/>
+              <a:rPr lang="zh-TW" altLang="en-US"/>
               <a:t>按一下以編輯母片標題樣式</a:t>
             </a:r>
-            <a:endParaRPr lang="zh-TW" altLang="en-US"/>
           </a:p>
         </p:txBody>
       </p:sp>
@@ -2372,10 +2369,9 @@
           </a:lstStyle>
           <a:p>
             <a:r>
-              <a:rPr lang="zh-TW" altLang="en-US" smtClean="0"/>
+              <a:rPr lang="zh-TW" altLang="en-US"/>
               <a:t>按一下圖示以新增圖片</a:t>
             </a:r>
-            <a:endParaRPr lang="zh-TW" altLang="en-US"/>
           </a:p>
         </p:txBody>
       </p:sp>
@@ -2438,7 +2434,7 @@
           <a:p>
             <a:pPr lvl="0"/>
             <a:r>
-              <a:rPr lang="zh-TW" altLang="en-US" smtClean="0"/>
+              <a:rPr lang="zh-TW" altLang="en-US"/>
               <a:t>按一下以編輯母片文字樣式</a:t>
             </a:r>
           </a:p>
@@ -2461,7 +2457,7 @@
           <a:p>
             <a:fld id="{C520DDB7-EA95-4FCE-A6EA-F779B0A6B144}" type="datetimeFigureOut">
               <a:rPr lang="zh-TW" altLang="en-US" smtClean="0"/>
-              <a:t>2019/7/21</a:t>
+              <a:t>2025/2/23</a:t>
             </a:fld>
             <a:endParaRPr lang="zh-TW" altLang="en-US"/>
           </a:p>
@@ -2570,10 +2566,9 @@
           <a:lstStyle/>
           <a:p>
             <a:r>
-              <a:rPr lang="zh-TW" altLang="en-US" smtClean="0"/>
+              <a:rPr lang="zh-TW" altLang="en-US"/>
               <a:t>按一下以編輯母片標題樣式</a:t>
             </a:r>
-            <a:endParaRPr lang="zh-TW" altLang="en-US"/>
           </a:p>
         </p:txBody>
       </p:sp>
@@ -2604,38 +2599,37 @@
           <a:p>
             <a:pPr lvl="0"/>
             <a:r>
-              <a:rPr lang="zh-TW" altLang="en-US" smtClean="0"/>
+              <a:rPr lang="zh-TW" altLang="en-US"/>
               <a:t>按一下以編輯母片文字樣式</a:t>
             </a:r>
           </a:p>
           <a:p>
             <a:pPr lvl="1"/>
             <a:r>
-              <a:rPr lang="zh-TW" altLang="en-US" smtClean="0"/>
+              <a:rPr lang="zh-TW" altLang="en-US"/>
               <a:t>第二層</a:t>
             </a:r>
           </a:p>
           <a:p>
             <a:pPr lvl="2"/>
             <a:r>
-              <a:rPr lang="zh-TW" altLang="en-US" smtClean="0"/>
+              <a:rPr lang="zh-TW" altLang="en-US"/>
               <a:t>第三層</a:t>
             </a:r>
           </a:p>
           <a:p>
             <a:pPr lvl="3"/>
             <a:r>
-              <a:rPr lang="zh-TW" altLang="en-US" smtClean="0"/>
+              <a:rPr lang="zh-TW" altLang="en-US"/>
               <a:t>第四層</a:t>
             </a:r>
           </a:p>
           <a:p>
             <a:pPr lvl="4"/>
             <a:r>
-              <a:rPr lang="zh-TW" altLang="en-US" smtClean="0"/>
+              <a:rPr lang="zh-TW" altLang="en-US"/>
               <a:t>第五層</a:t>
             </a:r>
-            <a:endParaRPr lang="zh-TW" altLang="en-US"/>
           </a:p>
         </p:txBody>
       </p:sp>
@@ -2674,7 +2668,7 @@
           <a:p>
             <a:fld id="{C520DDB7-EA95-4FCE-A6EA-F779B0A6B144}" type="datetimeFigureOut">
               <a:rPr lang="zh-TW" altLang="en-US" smtClean="0"/>
-              <a:t>2019/7/21</a:t>
+              <a:t>2025/2/23</a:t>
             </a:fld>
             <a:endParaRPr lang="zh-TW" altLang="en-US"/>
           </a:p>
@@ -3062,11 +3056,11 @@
           <a:lstStyle/>
           <a:p>
             <a:r>
-              <a:rPr lang="zh-CN" altLang="en-US" sz="4000" b="1" dirty="0" smtClean="0">
+              <a:rPr lang="zh-CN" altLang="en-US" sz="4000" b="1">
                 <a:latin typeface="微軟正黑體" pitchFamily="34" charset="-120"/>
                 <a:ea typeface="微軟正黑體" pitchFamily="34" charset="-120"/>
               </a:rPr>
-              <a:t>山又高</a:t>
+              <a:t>高又深</a:t>
             </a:r>
             <a:endParaRPr lang="zh-TW" altLang="en-US" sz="4000" b="1" dirty="0">
               <a:latin typeface="微軟正黑體" pitchFamily="34" charset="-120"/>
@@ -3096,13 +3090,13 @@
               <a:buNone/>
             </a:pPr>
             <a:r>
-              <a:rPr lang="zh-CN" altLang="en-US" sz="4800" b="1" dirty="0" smtClean="0">
+              <a:rPr lang="zh-CN" altLang="en-US" sz="4800" b="1" dirty="0">
                 <a:latin typeface="微軟正黑體" pitchFamily="34" charset="-120"/>
                 <a:ea typeface="微軟正黑體" pitchFamily="34" charset="-120"/>
               </a:rPr>
               <a:t>山又高   海又深</a:t>
             </a:r>
-            <a:endParaRPr lang="en-US" altLang="zh-CN" sz="4800" b="1" dirty="0" smtClean="0">
+            <a:endParaRPr lang="en-US" altLang="zh-CN" sz="4800" b="1" dirty="0">
               <a:latin typeface="微軟正黑體" pitchFamily="34" charset="-120"/>
               <a:ea typeface="微軟正黑體" pitchFamily="34" charset="-120"/>
             </a:endParaRPr>
@@ -3116,16 +3110,9 @@
                 <a:latin typeface="微軟正黑體" pitchFamily="34" charset="-120"/>
                 <a:ea typeface="微軟正黑體" pitchFamily="34" charset="-120"/>
               </a:rPr>
-              <a:t>主</a:t>
-            </a:r>
-            <a:r>
-              <a:rPr lang="zh-CN" altLang="en-US" sz="4800" b="1" dirty="0" smtClean="0">
-                <a:latin typeface="微軟正黑體" pitchFamily="34" charset="-120"/>
-                <a:ea typeface="微軟正黑體" pitchFamily="34" charset="-120"/>
-              </a:rPr>
-              <a:t>的愛似大山海洋</a:t>
-            </a:r>
-            <a:endParaRPr lang="en-US" altLang="zh-CN" sz="4800" b="1" dirty="0" smtClean="0">
+              <a:t>主的愛似大山海洋</a:t>
+            </a:r>
+            <a:endParaRPr lang="en-US" altLang="zh-CN" sz="4800" b="1" dirty="0">
               <a:latin typeface="微軟正黑體" pitchFamily="34" charset="-120"/>
               <a:ea typeface="微軟正黑體" pitchFamily="34" charset="-120"/>
             </a:endParaRPr>
@@ -3135,13 +3122,13 @@
               <a:buNone/>
             </a:pPr>
             <a:r>
-              <a:rPr lang="zh-CN" altLang="en-US" sz="4800" b="1" dirty="0" smtClean="0">
+              <a:rPr lang="zh-CN" altLang="en-US" sz="4800" b="1" dirty="0">
                 <a:latin typeface="微軟正黑體" pitchFamily="34" charset="-120"/>
                 <a:ea typeface="微軟正黑體" pitchFamily="34" charset="-120"/>
               </a:rPr>
               <a:t>山又高   海又深</a:t>
             </a:r>
-            <a:endParaRPr lang="en-US" altLang="zh-CN" sz="4800" b="1" dirty="0" smtClean="0">
+            <a:endParaRPr lang="en-US" altLang="zh-CN" sz="4800" b="1" dirty="0">
               <a:latin typeface="微軟正黑體" pitchFamily="34" charset="-120"/>
               <a:ea typeface="微軟正黑體" pitchFamily="34" charset="-120"/>
             </a:endParaRPr>
@@ -3151,7 +3138,7 @@
               <a:buNone/>
             </a:pPr>
             <a:r>
-              <a:rPr lang="zh-CN" altLang="en-US" sz="4800" b="1" dirty="0" smtClean="0">
+              <a:rPr lang="zh-CN" altLang="en-US" sz="4800" b="1" dirty="0">
                 <a:latin typeface="微軟正黑體" pitchFamily="34" charset="-120"/>
                 <a:ea typeface="微軟正黑體" pitchFamily="34" charset="-120"/>
               </a:rPr>
